--- a/img/Afbeelding_analyse_06082026.pptx
+++ b/img/Afbeelding_analyse_06082026.pptx
@@ -104,6 +104,11 @@
       </a:defRPr>
     </a:lvl9pPr>
   </p:defaultTextStyle>
+  <p:extLst>
+    <p:ext uri="{EFAFB233-063F-42B5-8137-9DF3F51BA10A}">
+      <p15:sldGuideLst xmlns:p15="http://schemas.microsoft.com/office/powerpoint/2012/main"/>
+    </p:ext>
+  </p:extLst>
 </p:presentation>
 </file>
 
@@ -256,7 +261,7 @@
           <a:p>
             <a:fld id="{860CC95E-1C75-4A5E-850A-B7CD265CBF7C}" type="datetimeFigureOut">
               <a:rPr lang="en-GB" smtClean="0"/>
-              <a:t>06/08/2026</a:t>
+              <a:t>01/09/2026</a:t>
             </a:fld>
             <a:endParaRPr lang="en-GB"/>
           </a:p>
@@ -456,7 +461,7 @@
           <a:p>
             <a:fld id="{860CC95E-1C75-4A5E-850A-B7CD265CBF7C}" type="datetimeFigureOut">
               <a:rPr lang="en-GB" smtClean="0"/>
-              <a:t>06/08/2026</a:t>
+              <a:t>01/09/2026</a:t>
             </a:fld>
             <a:endParaRPr lang="en-GB"/>
           </a:p>
@@ -666,7 +671,7 @@
           <a:p>
             <a:fld id="{860CC95E-1C75-4A5E-850A-B7CD265CBF7C}" type="datetimeFigureOut">
               <a:rPr lang="en-GB" smtClean="0"/>
-              <a:t>06/08/2026</a:t>
+              <a:t>01/09/2026</a:t>
             </a:fld>
             <a:endParaRPr lang="en-GB"/>
           </a:p>
@@ -866,7 +871,7 @@
           <a:p>
             <a:fld id="{860CC95E-1C75-4A5E-850A-B7CD265CBF7C}" type="datetimeFigureOut">
               <a:rPr lang="en-GB" smtClean="0"/>
-              <a:t>06/08/2026</a:t>
+              <a:t>01/09/2026</a:t>
             </a:fld>
             <a:endParaRPr lang="en-GB"/>
           </a:p>
@@ -1142,7 +1147,7 @@
           <a:p>
             <a:fld id="{860CC95E-1C75-4A5E-850A-B7CD265CBF7C}" type="datetimeFigureOut">
               <a:rPr lang="en-GB" smtClean="0"/>
-              <a:t>06/08/2026</a:t>
+              <a:t>01/09/2026</a:t>
             </a:fld>
             <a:endParaRPr lang="en-GB"/>
           </a:p>
@@ -1410,7 +1415,7 @@
           <a:p>
             <a:fld id="{860CC95E-1C75-4A5E-850A-B7CD265CBF7C}" type="datetimeFigureOut">
               <a:rPr lang="en-GB" smtClean="0"/>
-              <a:t>06/08/2026</a:t>
+              <a:t>01/09/2026</a:t>
             </a:fld>
             <a:endParaRPr lang="en-GB"/>
           </a:p>
@@ -1825,7 +1830,7 @@
           <a:p>
             <a:fld id="{860CC95E-1C75-4A5E-850A-B7CD265CBF7C}" type="datetimeFigureOut">
               <a:rPr lang="en-GB" smtClean="0"/>
-              <a:t>06/08/2026</a:t>
+              <a:t>01/09/2026</a:t>
             </a:fld>
             <a:endParaRPr lang="en-GB"/>
           </a:p>
@@ -1967,7 +1972,7 @@
           <a:p>
             <a:fld id="{860CC95E-1C75-4A5E-850A-B7CD265CBF7C}" type="datetimeFigureOut">
               <a:rPr lang="en-GB" smtClean="0"/>
-              <a:t>06/08/2026</a:t>
+              <a:t>01/09/2026</a:t>
             </a:fld>
             <a:endParaRPr lang="en-GB"/>
           </a:p>
@@ -2080,7 +2085,7 @@
           <a:p>
             <a:fld id="{860CC95E-1C75-4A5E-850A-B7CD265CBF7C}" type="datetimeFigureOut">
               <a:rPr lang="en-GB" smtClean="0"/>
-              <a:t>06/08/2026</a:t>
+              <a:t>01/09/2026</a:t>
             </a:fld>
             <a:endParaRPr lang="en-GB"/>
           </a:p>
@@ -2393,7 +2398,7 @@
           <a:p>
             <a:fld id="{860CC95E-1C75-4A5E-850A-B7CD265CBF7C}" type="datetimeFigureOut">
               <a:rPr lang="en-GB" smtClean="0"/>
-              <a:t>06/08/2026</a:t>
+              <a:t>01/09/2026</a:t>
             </a:fld>
             <a:endParaRPr lang="en-GB"/>
           </a:p>
@@ -2682,7 +2687,7 @@
           <a:p>
             <a:fld id="{860CC95E-1C75-4A5E-850A-B7CD265CBF7C}" type="datetimeFigureOut">
               <a:rPr lang="en-GB" smtClean="0"/>
-              <a:t>06/08/2026</a:t>
+              <a:t>01/09/2026</a:t>
             </a:fld>
             <a:endParaRPr lang="en-GB"/>
           </a:p>
@@ -2925,7 +2930,7 @@
           <a:p>
             <a:fld id="{860CC95E-1C75-4A5E-850A-B7CD265CBF7C}" type="datetimeFigureOut">
               <a:rPr lang="en-GB" smtClean="0"/>
-              <a:t>06/08/2026</a:t>
+              <a:t>01/09/2026</a:t>
             </a:fld>
             <a:endParaRPr lang="en-GB"/>
           </a:p>
@@ -3350,6 +3355,112 @@
       </p:grpSpPr>
       <p:sp>
         <p:nvSpPr>
+          <p:cNvPr id="113" name="Vrije vorm: vorm 112">
+            <a:extLst>
+              <a:ext uri="{FF2B5EF4-FFF2-40B4-BE49-F238E27FC236}">
+                <a16:creationId xmlns:a16="http://schemas.microsoft.com/office/drawing/2014/main" id="{3CC168EA-1B53-6C34-AB0E-A6983B3E359F}"/>
+              </a:ext>
+            </a:extLst>
+          </p:cNvPr>
+          <p:cNvSpPr/>
+          <p:nvPr/>
+        </p:nvSpPr>
+        <p:spPr>
+          <a:xfrm>
+            <a:off x="3361267" y="1579033"/>
+            <a:ext cx="4072466" cy="842434"/>
+          </a:xfrm>
+          <a:custGeom>
+            <a:avLst/>
+            <a:gdLst>
+              <a:gd name="connsiteX0" fmla="*/ 0 w 4072466"/>
+              <a:gd name="connsiteY0" fmla="*/ 838200 h 842434"/>
+              <a:gd name="connsiteX1" fmla="*/ 4072466 w 4072466"/>
+              <a:gd name="connsiteY1" fmla="*/ 842434 h 842434"/>
+              <a:gd name="connsiteX2" fmla="*/ 2671233 w 4072466"/>
+              <a:gd name="connsiteY2" fmla="*/ 4234 h 842434"/>
+              <a:gd name="connsiteX3" fmla="*/ 1413933 w 4072466"/>
+              <a:gd name="connsiteY3" fmla="*/ 0 h 842434"/>
+              <a:gd name="connsiteX4" fmla="*/ 0 w 4072466"/>
+              <a:gd name="connsiteY4" fmla="*/ 838200 h 842434"/>
+            </a:gdLst>
+            <a:ahLst/>
+            <a:cxnLst>
+              <a:cxn ang="0">
+                <a:pos x="connsiteX0" y="connsiteY0"/>
+              </a:cxn>
+              <a:cxn ang="0">
+                <a:pos x="connsiteX1" y="connsiteY1"/>
+              </a:cxn>
+              <a:cxn ang="0">
+                <a:pos x="connsiteX2" y="connsiteY2"/>
+              </a:cxn>
+              <a:cxn ang="0">
+                <a:pos x="connsiteX3" y="connsiteY3"/>
+              </a:cxn>
+              <a:cxn ang="0">
+                <a:pos x="connsiteX4" y="connsiteY4"/>
+              </a:cxn>
+            </a:cxnLst>
+            <a:rect l="l" t="t" r="r" b="b"/>
+            <a:pathLst>
+              <a:path w="4072466" h="842434">
+                <a:moveTo>
+                  <a:pt x="0" y="838200"/>
+                </a:moveTo>
+                <a:lnTo>
+                  <a:pt x="4072466" y="842434"/>
+                </a:lnTo>
+                <a:lnTo>
+                  <a:pt x="2671233" y="4234"/>
+                </a:lnTo>
+                <a:lnTo>
+                  <a:pt x="1413933" y="0"/>
+                </a:lnTo>
+                <a:lnTo>
+                  <a:pt x="0" y="838200"/>
+                </a:lnTo>
+                <a:close/>
+              </a:path>
+            </a:pathLst>
+          </a:custGeom>
+          <a:solidFill>
+            <a:schemeClr val="accent2">
+              <a:lumMod val="50000"/>
+              <a:alpha val="60000"/>
+            </a:schemeClr>
+          </a:solidFill>
+          <a:ln>
+            <a:noFill/>
+          </a:ln>
+        </p:spPr>
+        <p:style>
+          <a:lnRef idx="2">
+            <a:schemeClr val="accent1">
+              <a:shade val="15000"/>
+            </a:schemeClr>
+          </a:lnRef>
+          <a:fillRef idx="1">
+            <a:schemeClr val="accent1"/>
+          </a:fillRef>
+          <a:effectRef idx="0">
+            <a:schemeClr val="accent1"/>
+          </a:effectRef>
+          <a:fontRef idx="minor">
+            <a:schemeClr val="lt1"/>
+          </a:fontRef>
+        </p:style>
+        <p:txBody>
+          <a:bodyPr rtlCol="0" anchor="ctr"/>
+          <a:lstStyle/>
+          <a:p>
+            <a:pPr algn="ctr"/>
+            <a:endParaRPr lang="en-GB"/>
+          </a:p>
+        </p:txBody>
+      </p:sp>
+      <p:sp>
+        <p:nvSpPr>
           <p:cNvPr id="134" name="Vrije vorm: vorm 133">
             <a:extLst>
               <a:ext uri="{FF2B5EF4-FFF2-40B4-BE49-F238E27FC236}">
@@ -4423,10 +4534,7 @@
           <a:noFill/>
           <a:ln>
             <a:solidFill>
-              <a:schemeClr val="accent4">
-                <a:lumMod val="60000"/>
-                <a:lumOff val="40000"/>
-              </a:schemeClr>
+              <a:srgbClr val="FFFF00"/>
             </a:solidFill>
             <a:prstDash val="dash"/>
           </a:ln>
@@ -4532,113 +4640,6 @@
               <a:lumMod val="20000"/>
               <a:lumOff val="80000"/>
               <a:alpha val="61000"/>
-            </a:schemeClr>
-          </a:solidFill>
-          <a:ln>
-            <a:noFill/>
-          </a:ln>
-        </p:spPr>
-        <p:style>
-          <a:lnRef idx="2">
-            <a:schemeClr val="accent1">
-              <a:shade val="15000"/>
-            </a:schemeClr>
-          </a:lnRef>
-          <a:fillRef idx="1">
-            <a:schemeClr val="accent1"/>
-          </a:fillRef>
-          <a:effectRef idx="0">
-            <a:schemeClr val="accent1"/>
-          </a:effectRef>
-          <a:fontRef idx="minor">
-            <a:schemeClr val="lt1"/>
-          </a:fontRef>
-        </p:style>
-        <p:txBody>
-          <a:bodyPr rtlCol="0" anchor="ctr"/>
-          <a:lstStyle/>
-          <a:p>
-            <a:pPr algn="ctr"/>
-            <a:endParaRPr lang="en-GB"/>
-          </a:p>
-        </p:txBody>
-      </p:sp>
-      <p:sp>
-        <p:nvSpPr>
-          <p:cNvPr id="113" name="Vrije vorm: vorm 112">
-            <a:extLst>
-              <a:ext uri="{FF2B5EF4-FFF2-40B4-BE49-F238E27FC236}">
-                <a16:creationId xmlns:a16="http://schemas.microsoft.com/office/drawing/2014/main" id="{3CC168EA-1B53-6C34-AB0E-A6983B3E359F}"/>
-              </a:ext>
-            </a:extLst>
-          </p:cNvPr>
-          <p:cNvSpPr/>
-          <p:nvPr/>
-        </p:nvSpPr>
-        <p:spPr>
-          <a:xfrm>
-            <a:off x="3361267" y="1579033"/>
-            <a:ext cx="4072466" cy="842434"/>
-          </a:xfrm>
-          <a:custGeom>
-            <a:avLst/>
-            <a:gdLst>
-              <a:gd name="connsiteX0" fmla="*/ 0 w 4072466"/>
-              <a:gd name="connsiteY0" fmla="*/ 838200 h 842434"/>
-              <a:gd name="connsiteX1" fmla="*/ 4072466 w 4072466"/>
-              <a:gd name="connsiteY1" fmla="*/ 842434 h 842434"/>
-              <a:gd name="connsiteX2" fmla="*/ 2671233 w 4072466"/>
-              <a:gd name="connsiteY2" fmla="*/ 4234 h 842434"/>
-              <a:gd name="connsiteX3" fmla="*/ 1413933 w 4072466"/>
-              <a:gd name="connsiteY3" fmla="*/ 0 h 842434"/>
-              <a:gd name="connsiteX4" fmla="*/ 0 w 4072466"/>
-              <a:gd name="connsiteY4" fmla="*/ 838200 h 842434"/>
-            </a:gdLst>
-            <a:ahLst/>
-            <a:cxnLst>
-              <a:cxn ang="0">
-                <a:pos x="connsiteX0" y="connsiteY0"/>
-              </a:cxn>
-              <a:cxn ang="0">
-                <a:pos x="connsiteX1" y="connsiteY1"/>
-              </a:cxn>
-              <a:cxn ang="0">
-                <a:pos x="connsiteX2" y="connsiteY2"/>
-              </a:cxn>
-              <a:cxn ang="0">
-                <a:pos x="connsiteX3" y="connsiteY3"/>
-              </a:cxn>
-              <a:cxn ang="0">
-                <a:pos x="connsiteX4" y="connsiteY4"/>
-              </a:cxn>
-            </a:cxnLst>
-            <a:rect l="l" t="t" r="r" b="b"/>
-            <a:pathLst>
-              <a:path w="4072466" h="842434">
-                <a:moveTo>
-                  <a:pt x="0" y="838200"/>
-                </a:moveTo>
-                <a:lnTo>
-                  <a:pt x="4072466" y="842434"/>
-                </a:lnTo>
-                <a:lnTo>
-                  <a:pt x="2671233" y="4234"/>
-                </a:lnTo>
-                <a:lnTo>
-                  <a:pt x="1413933" y="0"/>
-                </a:lnTo>
-                <a:lnTo>
-                  <a:pt x="0" y="838200"/>
-                </a:lnTo>
-                <a:close/>
-              </a:path>
-            </a:pathLst>
-          </a:custGeom>
-          <a:solidFill>
-            <a:schemeClr val="accent4">
-              <a:lumMod val="20000"/>
-              <a:lumOff val="80000"/>
-              <a:alpha val="60000"/>
             </a:schemeClr>
           </a:solidFill>
           <a:ln>
